--- a/История/История района Царицыно.pptx
+++ b/История/История района Царицыно.pptx
@@ -154,7 +154,7 @@
         <p:txBody>
           <a:bodyPr/>
           <a:p>
-            <a:fld id="{4858C35D-AAF8-42E7-8E5A-E95D25630343}" type="slidenum">
+            <a:fld id="{AD7E647F-BFF5-4B0A-84D1-EC422D3B1EDF}" type="slidenum">
               <a:t>&lt;#&gt;</a:t>
             </a:fld>
           </a:p>
@@ -324,7 +324,7 @@
         <p:txBody>
           <a:bodyPr/>
           <a:p>
-            <a:fld id="{4103452D-D183-4687-B684-18479DCEE680}" type="slidenum">
+            <a:fld id="{5B8C2144-9439-466D-9D8F-83B421E22240}" type="slidenum">
               <a:t>&lt;#&gt;</a:t>
             </a:fld>
           </a:p>
@@ -855,7 +855,7 @@
             <a:pPr indent="0" algn="r">
               <a:buNone/>
             </a:pPr>
-            <a:fld id="{E115DF90-7CEB-4F1C-8AC4-B2821E703BEC}" type="slidenum">
+            <a:fld id="{9B27758E-A57A-41EB-B5FA-3B838C7308AE}" type="slidenum">
               <a:rPr b="0" lang="ru-RU" sz="1400" strike="noStrike" u="none">
                 <a:solidFill>
                   <a:srgbClr val="000000"/>
@@ -916,8 +916,8 @@
         </p:nvSpPr>
         <p:spPr>
           <a:xfrm>
-            <a:off x="504000" y="74160"/>
-            <a:ext cx="9071640" cy="1250280"/>
+            <a:off x="504000" y="226080"/>
+            <a:ext cx="9071640" cy="946440"/>
           </a:xfrm>
           <a:prstGeom prst="rect">
             <a:avLst/>
@@ -935,6 +935,17 @@
             <a:pPr indent="0" algn="ctr">
               <a:buNone/>
             </a:pPr>
+            <a:r>
+              <a:rPr b="0" lang="ru-RU" sz="4400" strike="noStrike" u="none">
+                <a:solidFill>
+                  <a:srgbClr val="000000"/>
+                </a:solidFill>
+                <a:effectLst/>
+                <a:uFillTx/>
+                <a:latin typeface="Arial"/>
+              </a:rPr>
+              <a:t>Район «Царицыно»</a:t>
+            </a:r>
             <a:endParaRPr b="0" lang="ru-RU" sz="4400" strike="noStrike" u="none">
               <a:solidFill>
                 <a:srgbClr val="000000"/>
@@ -977,6 +988,17 @@
             <a:pPr indent="0" algn="ctr">
               <a:buNone/>
             </a:pPr>
+            <a:r>
+              <a:rPr b="0" lang="ru-RU" sz="3200" strike="noStrike" u="none">
+                <a:solidFill>
+                  <a:srgbClr val="000000"/>
+                </a:solidFill>
+                <a:effectLst/>
+                <a:uFillTx/>
+                <a:latin typeface="Arial"/>
+              </a:rPr>
+              <a:t>Доклад подготовил: студент группы БСТ2502 Кочкин Иван Владимирович</a:t>
+            </a:r>
             <a:endParaRPr b="0" lang="ru-RU" sz="3200" strike="noStrike" u="none">
               <a:solidFill>
                 <a:srgbClr val="000000"/>
@@ -1071,51 +1093,31 @@
           </a:p>
         </p:txBody>
       </p:sp>
-      <p:sp>
-        <p:nvSpPr>
-          <p:cNvPr id="14" name="PlaceHolder 2"/>
-          <p:cNvSpPr>
-            <a:spLocks noGrp="1"/>
-          </p:cNvSpPr>
-          <p:nvPr>
-            <p:ph/>
-          </p:nvPr>
-        </p:nvSpPr>
-        <p:spPr>
-          <a:xfrm>
-            <a:off x="504000" y="1326600"/>
-            <a:ext cx="9071640" cy="3288240"/>
-          </a:xfrm>
-          <a:prstGeom prst="rect">
-            <a:avLst/>
-          </a:prstGeom>
-          <a:noFill/>
-          <a:ln w="0">
-            <a:noFill/>
-          </a:ln>
-        </p:spPr>
-        <p:txBody>
-          <a:bodyPr lIns="0" rIns="0" tIns="0" bIns="0" anchor="t">
-            <a:normAutofit/>
-          </a:bodyPr>
-          <a:p>
-            <a:pPr indent="0">
-              <a:spcBef>
-                <a:spcPts val="1417"/>
-              </a:spcBef>
-              <a:buNone/>
-            </a:pPr>
-            <a:endParaRPr b="0" lang="ru-RU" sz="3200" strike="noStrike" u="none">
-              <a:solidFill>
-                <a:srgbClr val="000000"/>
-              </a:solidFill>
-              <a:effectLst/>
-              <a:uFillTx/>
-              <a:latin typeface="Arial"/>
-            </a:endParaRPr>
-          </a:p>
-        </p:txBody>
-      </p:sp>
+      <p:pic>
+        <p:nvPicPr>
+          <p:cNvPr id="14" name="" descr=""/>
+          <p:cNvPicPr/>
+          <p:nvPr/>
+        </p:nvPicPr>
+        <p:blipFill>
+          <a:blip r:embed="rId1"/>
+          <a:srcRect l="0" t="0" r="0" b="22226"/>
+          <a:stretch/>
+        </p:blipFill>
+        <p:spPr>
+          <a:xfrm>
+            <a:off x="242640" y="1080000"/>
+            <a:ext cx="4199400" cy="4409280"/>
+          </a:xfrm>
+          <a:prstGeom prst="rect">
+            <a:avLst/>
+          </a:prstGeom>
+          <a:noFill/>
+          <a:ln w="0">
+            <a:noFill/>
+          </a:ln>
+        </p:spPr>
+      </p:pic>
     </p:spTree>
   </p:cSld>
   <mc:AlternateContent>
